--- a/hercules2026_D_coherence_transport.pptx
+++ b/hercules2026_D_coherence_transport.pptx
@@ -248,7 +248,7 @@
             <a:fld id="{D680E798-53FF-4C51-A981-953463752515}" type="datetimeFigureOut">
               <a:rPr lang="fr-FR" smtClean="0"/>
               <a:pPr/>
-              <a:t>20/03/2025</a:t>
+              <a:t>23/02/2026</a:t>
             </a:fld>
             <a:endParaRPr lang="fr-FR"/>
           </a:p>
@@ -765,7 +765,7 @@
           <a:p>
             <a:r>
               <a:rPr lang="en-US" noProof="0"/>
-              <a:t>OASYS-Coherence transport | HERCULES2025</a:t>
+              <a:t>OASYS-Coherence transport | HERCULES2026</a:t>
             </a:r>
             <a:endParaRPr lang="en-US" noProof="0" dirty="0"/>
           </a:p>
@@ -1094,7 +1094,7 @@
           <a:p>
             <a:r>
               <a:rPr lang="en-US" noProof="0"/>
-              <a:t>OASYS-Coherence transport | HERCULES2025</a:t>
+              <a:t>OASYS-Coherence transport | HERCULES2026</a:t>
             </a:r>
           </a:p>
         </p:txBody>
@@ -1281,7 +1281,7 @@
           <a:p>
             <a:r>
               <a:rPr lang="en-US" noProof="0"/>
-              <a:t>OASYS-Coherence transport | HERCULES2025</a:t>
+              <a:t>OASYS-Coherence transport | HERCULES2026</a:t>
             </a:r>
           </a:p>
         </p:txBody>
@@ -1400,7 +1400,7 @@
           <a:p>
             <a:r>
               <a:rPr lang="en-US" noProof="0"/>
-              <a:t>OASYS-Coherence transport | HERCULES2025</a:t>
+              <a:t>OASYS-Coherence transport | HERCULES2026</a:t>
             </a:r>
           </a:p>
         </p:txBody>
@@ -1633,7 +1633,7 @@
           <a:p>
             <a:r>
               <a:rPr lang="en-US"/>
-              <a:t>OASYS-Coherence transport | HERCULES2025</a:t>
+              <a:t>OASYS-Coherence transport | HERCULES2026</a:t>
             </a:r>
             <a:endParaRPr lang="fr-FR" dirty="0"/>
           </a:p>
@@ -2201,7 +2201,7 @@
           <a:p>
             <a:r>
               <a:rPr lang="en-US" noProof="0"/>
-              <a:t>OASYS-Coherence transport | HERCULES2025</a:t>
+              <a:t>OASYS-Coherence transport | HERCULES2026</a:t>
             </a:r>
           </a:p>
         </p:txBody>
@@ -2304,7 +2304,7 @@
           <a:p>
             <a:r>
               <a:rPr lang="en-US" noProof="0"/>
-              <a:t>OASYS-Coherence transport | HERCULES2025</a:t>
+              <a:t>OASYS-Coherence transport | HERCULES2026</a:t>
             </a:r>
             <a:endParaRPr lang="en-US" noProof="0" dirty="0"/>
           </a:p>
@@ -2732,7 +2732,7 @@
           <a:p>
             <a:r>
               <a:rPr lang="en-US" noProof="0"/>
-              <a:t>OASYS-Coherence transport | HERCULES2025</a:t>
+              <a:t>OASYS-Coherence transport | HERCULES2026</a:t>
             </a:r>
             <a:endParaRPr lang="en-US" noProof="0" dirty="0"/>
           </a:p>
@@ -3527,7 +3527,7 @@
           <a:p>
             <a:r>
               <a:rPr lang="en-US" noProof="0"/>
-              <a:t>OASYS-Coherence transport | HERCULES2025</a:t>
+              <a:t>OASYS-Coherence transport | HERCULES2026</a:t>
             </a:r>
             <a:endParaRPr lang="en-US" noProof="0" dirty="0"/>
           </a:p>
@@ -4030,7 +4030,7 @@
           <a:p>
             <a:r>
               <a:rPr lang="en-US" noProof="0"/>
-              <a:t>OASYS-Coherence transport | HERCULES2025</a:t>
+              <a:t>OASYS-Coherence transport | HERCULES2026</a:t>
             </a:r>
             <a:endParaRPr lang="en-US" noProof="0" dirty="0"/>
           </a:p>
@@ -5701,7 +5701,7 @@
           <a:p>
             <a:r>
               <a:rPr lang="en-US" noProof="0"/>
-              <a:t>OASYS-Coherence transport | HERCULES2025</a:t>
+              <a:t>OASYS-Coherence transport | HERCULES2026</a:t>
             </a:r>
             <a:endParaRPr lang="en-US" noProof="0" dirty="0"/>
           </a:p>
@@ -6252,15 +6252,15 @@
             <a:pPr algn="ctr"/>
             <a:r>
               <a:rPr lang="en-US" sz="1167" dirty="0"/>
-              <a:t>March 21</a:t>
+              <a:t>March 5</a:t>
             </a:r>
             <a:r>
               <a:rPr lang="en-US" sz="1167" baseline="30000" dirty="0"/>
-              <a:t>st</a:t>
+              <a:t>th</a:t>
             </a:r>
             <a:r>
               <a:rPr lang="en-US" sz="1167" dirty="0"/>
-              <a:t> 2025</a:t>
+              <a:t>, 2026</a:t>
             </a:r>
           </a:p>
           <a:p>
@@ -6346,7 +6346,7 @@
           <a:p>
             <a:r>
               <a:rPr lang="en-GB" sz="833"/>
-              <a:t>OASYS-Coherence transport | HERCULES2025</a:t>
+              <a:t>OASYS-Coherence transport | HERCULES2026</a:t>
             </a:r>
             <a:endParaRPr lang="fr-FR" sz="833" dirty="0"/>
           </a:p>
@@ -6647,7 +6647,7 @@
           <a:p>
             <a:r>
               <a:rPr lang="en-US" noProof="0"/>
-              <a:t>OASYS-Coherence transport | HERCULES2025</a:t>
+              <a:t>OASYS-Coherence transport | HERCULES2026</a:t>
             </a:r>
           </a:p>
         </p:txBody>
@@ -7028,7 +7028,7 @@
           <a:p>
             <a:r>
               <a:rPr lang="en-US" noProof="0"/>
-              <a:t>OASYS-Coherence transport | HERCULES2025</a:t>
+              <a:t>OASYS-Coherence transport | HERCULES2026</a:t>
             </a:r>
           </a:p>
         </p:txBody>
@@ -7923,7 +7923,7 @@
           <a:p>
             <a:r>
               <a:rPr lang="en-US" noProof="0"/>
-              <a:t>OASYS-Coherence transport | HERCULES2025</a:t>
+              <a:t>OASYS-Coherence transport | HERCULES2026</a:t>
             </a:r>
             <a:endParaRPr lang="en-US" noProof="0" dirty="0"/>
           </a:p>
@@ -8711,7 +8711,7 @@
           <a:p>
             <a:r>
               <a:rPr lang="en-US" noProof="0"/>
-              <a:t>OASYS-Coherence transport | HERCULES2025</a:t>
+              <a:t>OASYS-Coherence transport | HERCULES2026</a:t>
             </a:r>
             <a:endParaRPr lang="en-US" noProof="0" dirty="0"/>
           </a:p>
@@ -10963,7 +10963,7 @@
           <a:p>
             <a:r>
               <a:rPr lang="en-US" noProof="0"/>
-              <a:t>OASYS-Coherence transport | HERCULES2025</a:t>
+              <a:t>OASYS-Coherence transport | HERCULES2026</a:t>
             </a:r>
             <a:endParaRPr lang="en-US" noProof="0" dirty="0"/>
           </a:p>
@@ -12815,7 +12815,7 @@
           <a:p>
             <a:r>
               <a:rPr lang="en-US" noProof="0"/>
-              <a:t>OASYS-Coherence transport | HERCULES2025</a:t>
+              <a:t>OASYS-Coherence transport | HERCULES2026</a:t>
             </a:r>
             <a:endParaRPr lang="en-US" noProof="0" dirty="0"/>
           </a:p>
@@ -13938,7 +13938,7 @@
           <a:p>
             <a:r>
               <a:rPr lang="en-US" noProof="0"/>
-              <a:t>OASYS-Coherence transport | HERCULES2025</a:t>
+              <a:t>OASYS-Coherence transport | HERCULES2026</a:t>
             </a:r>
             <a:endParaRPr lang="en-US" noProof="0" dirty="0"/>
           </a:p>
